--- a/doc/Automated Emergency Brake Group2 HUN.pptx
+++ b/doc/Automated Emergency Brake Group2 HUN.pptx
@@ -8,10 +8,12 @@
     <p:sldId id="256" r:id="rId2"/>
     <p:sldId id="257" r:id="rId3"/>
     <p:sldId id="258" r:id="rId4"/>
-    <p:sldId id="259" r:id="rId5"/>
-    <p:sldId id="260" r:id="rId6"/>
-    <p:sldId id="261" r:id="rId7"/>
-    <p:sldId id="262" r:id="rId8"/>
+    <p:sldId id="263" r:id="rId5"/>
+    <p:sldId id="264" r:id="rId6"/>
+    <p:sldId id="259" r:id="rId7"/>
+    <p:sldId id="260" r:id="rId8"/>
+    <p:sldId id="261" r:id="rId9"/>
+    <p:sldId id="262" r:id="rId10"/>
   </p:sldIdLst>
   <p:sldSz cx="12192000" cy="6858000"/>
   <p:notesSz cx="6858000" cy="9144000"/>
@@ -121,7 +123,7 @@
 <file path=ppt/revisionInfo.xml><?xml version="1.0" encoding="utf-8"?>
 <p1510:revInfo xmlns:a="http://schemas.openxmlformats.org/drawingml/2006/main" xmlns:r="http://schemas.openxmlformats.org/officeDocument/2006/relationships" xmlns:p1510="http://schemas.microsoft.com/office/powerpoint/2015/10/main">
   <p1510:revLst>
-    <p1510:client id="{46E060B1-5F1C-41C8-B681-E99EC520B449}" v="31" dt="2026-04-11T11:31:12.189"/>
+    <p1510:client id="{46E060B1-5F1C-41C8-B681-E99EC520B449}" v="12" dt="2026-04-19T21:37:19.558"/>
   </p1510:revLst>
 </p1510:revInfo>
 </file>
@@ -130,8 +132,8 @@
 <pc:chgInfo xmlns:a="http://schemas.openxmlformats.org/drawingml/2006/main" xmlns:r="http://schemas.openxmlformats.org/officeDocument/2006/relationships" xmlns:ac="http://schemas.microsoft.com/office/drawing/2013/main/command" xmlns:pc="http://schemas.microsoft.com/office/powerpoint/2013/main/command">
   <pc:docChgLst>
     <pc:chgData name="Horváth Gábor Timót" userId="6b190c0b-b7a5-44d6-a153-62faea1c1e8d" providerId="ADAL" clId="{E9885F06-42F8-43E5-9640-56F69EAE1246}"/>
-    <pc:docChg chg="custSel modSld">
-      <pc:chgData name="Horváth Gábor Timót" userId="6b190c0b-b7a5-44d6-a153-62faea1c1e8d" providerId="ADAL" clId="{E9885F06-42F8-43E5-9640-56F69EAE1246}" dt="2026-04-11T11:31:12.189" v="649"/>
+    <pc:docChg chg="custSel addSld modSld">
+      <pc:chgData name="Horváth Gábor Timót" userId="6b190c0b-b7a5-44d6-a153-62faea1c1e8d" providerId="ADAL" clId="{E9885F06-42F8-43E5-9640-56F69EAE1246}" dt="2026-04-19T21:37:27.252" v="839" actId="20577"/>
       <pc:docMkLst>
         <pc:docMk/>
       </pc:docMkLst>
@@ -228,7 +230,7 @@
         </pc:spChg>
       </pc:sldChg>
       <pc:sldChg chg="modSp mod">
-        <pc:chgData name="Horváth Gábor Timót" userId="6b190c0b-b7a5-44d6-a153-62faea1c1e8d" providerId="ADAL" clId="{E9885F06-42F8-43E5-9640-56F69EAE1246}" dt="2026-04-11T11:28:44.141" v="581" actId="20577"/>
+        <pc:chgData name="Horváth Gábor Timót" userId="6b190c0b-b7a5-44d6-a153-62faea1c1e8d" providerId="ADAL" clId="{E9885F06-42F8-43E5-9640-56F69EAE1246}" dt="2026-04-14T08:47:46.222" v="673" actId="20577"/>
         <pc:sldMkLst>
           <pc:docMk/>
           <pc:sldMk cId="4184740914" sldId="260"/>
@@ -242,7 +244,7 @@
           </ac:spMkLst>
         </pc:spChg>
         <pc:spChg chg="mod">
-          <ac:chgData name="Horváth Gábor Timót" userId="6b190c0b-b7a5-44d6-a153-62faea1c1e8d" providerId="ADAL" clId="{E9885F06-42F8-43E5-9640-56F69EAE1246}" dt="2026-04-11T11:28:44.141" v="581" actId="20577"/>
+          <ac:chgData name="Horváth Gábor Timót" userId="6b190c0b-b7a5-44d6-a153-62faea1c1e8d" providerId="ADAL" clId="{E9885F06-42F8-43E5-9640-56F69EAE1246}" dt="2026-04-14T08:47:46.222" v="673" actId="20577"/>
           <ac:spMkLst>
             <pc:docMk/>
             <pc:sldMk cId="4184740914" sldId="260"/>
@@ -251,7 +253,7 @@
         </pc:spChg>
       </pc:sldChg>
       <pc:sldChg chg="modSp mod">
-        <pc:chgData name="Horváth Gábor Timót" userId="6b190c0b-b7a5-44d6-a153-62faea1c1e8d" providerId="ADAL" clId="{E9885F06-42F8-43E5-9640-56F69EAE1246}" dt="2026-04-11T11:30:41.319" v="648"/>
+        <pc:chgData name="Horváth Gábor Timót" userId="6b190c0b-b7a5-44d6-a153-62faea1c1e8d" providerId="ADAL" clId="{E9885F06-42F8-43E5-9640-56F69EAE1246}" dt="2026-04-14T08:52:25.803" v="674" actId="20577"/>
         <pc:sldMkLst>
           <pc:docMk/>
           <pc:sldMk cId="3176090256" sldId="261"/>
@@ -265,7 +267,7 @@
           </ac:spMkLst>
         </pc:spChg>
         <pc:spChg chg="mod">
-          <ac:chgData name="Horváth Gábor Timót" userId="6b190c0b-b7a5-44d6-a153-62faea1c1e8d" providerId="ADAL" clId="{E9885F06-42F8-43E5-9640-56F69EAE1246}" dt="2026-04-11T11:30:41.319" v="648"/>
+          <ac:chgData name="Horváth Gábor Timót" userId="6b190c0b-b7a5-44d6-a153-62faea1c1e8d" providerId="ADAL" clId="{E9885F06-42F8-43E5-9640-56F69EAE1246}" dt="2026-04-14T08:52:25.803" v="674" actId="20577"/>
           <ac:spMkLst>
             <pc:docMk/>
             <pc:sldMk cId="3176090256" sldId="261"/>
@@ -293,6 +295,44 @@
             <pc:docMk/>
             <pc:sldMk cId="3331289718" sldId="262"/>
             <ac:spMk id="3" creationId="{C0FCF3D4-23A9-FE83-3918-DD7F2340CF05}"/>
+          </ac:spMkLst>
+        </pc:spChg>
+      </pc:sldChg>
+      <pc:sldChg chg="modSp new mod">
+        <pc:chgData name="Horváth Gábor Timót" userId="6b190c0b-b7a5-44d6-a153-62faea1c1e8d" providerId="ADAL" clId="{E9885F06-42F8-43E5-9640-56F69EAE1246}" dt="2026-04-19T21:35:02.191" v="749"/>
+        <pc:sldMkLst>
+          <pc:docMk/>
+          <pc:sldMk cId="924554517" sldId="263"/>
+        </pc:sldMkLst>
+        <pc:spChg chg="mod">
+          <ac:chgData name="Horváth Gábor Timót" userId="6b190c0b-b7a5-44d6-a153-62faea1c1e8d" providerId="ADAL" clId="{E9885F06-42F8-43E5-9640-56F69EAE1246}" dt="2026-04-19T21:32:08.228" v="687" actId="20577"/>
+          <ac:spMkLst>
+            <pc:docMk/>
+            <pc:sldMk cId="924554517" sldId="263"/>
+            <ac:spMk id="2" creationId="{BAFF35F4-B390-A234-6862-6FF124B7E8CB}"/>
+          </ac:spMkLst>
+        </pc:spChg>
+        <pc:spChg chg="mod">
+          <ac:chgData name="Horváth Gábor Timót" userId="6b190c0b-b7a5-44d6-a153-62faea1c1e8d" providerId="ADAL" clId="{E9885F06-42F8-43E5-9640-56F69EAE1246}" dt="2026-04-19T21:35:02.191" v="749"/>
+          <ac:spMkLst>
+            <pc:docMk/>
+            <pc:sldMk cId="924554517" sldId="263"/>
+            <ac:spMk id="3" creationId="{0827CC1D-AB15-347A-E944-787652EF894A}"/>
+          </ac:spMkLst>
+        </pc:spChg>
+      </pc:sldChg>
+      <pc:sldChg chg="modSp add mod">
+        <pc:chgData name="Horváth Gábor Timót" userId="6b190c0b-b7a5-44d6-a153-62faea1c1e8d" providerId="ADAL" clId="{E9885F06-42F8-43E5-9640-56F69EAE1246}" dt="2026-04-19T21:37:27.252" v="839" actId="20577"/>
+        <pc:sldMkLst>
+          <pc:docMk/>
+          <pc:sldMk cId="2832333463" sldId="264"/>
+        </pc:sldMkLst>
+        <pc:spChg chg="mod">
+          <ac:chgData name="Horváth Gábor Timót" userId="6b190c0b-b7a5-44d6-a153-62faea1c1e8d" providerId="ADAL" clId="{E9885F06-42F8-43E5-9640-56F69EAE1246}" dt="2026-04-19T21:37:27.252" v="839" actId="20577"/>
+          <ac:spMkLst>
+            <pc:docMk/>
+            <pc:sldMk cId="2832333463" sldId="264"/>
+            <ac:spMk id="3" creationId="{1D7E26D1-0904-2021-C231-47F609A841B2}"/>
           </ac:spMkLst>
         </pc:spChg>
       </pc:sldChg>
@@ -477,7 +517,7 @@
             <a:fld id="{5816CF25-28A6-44B7-AA26-A9DDEE15FAB8}" type="datetimeFigureOut">
               <a:rPr lang="hu-HU" smtClean="0"/>
               <a:pPr/>
-              <a:t>2026. 04. 11.</a:t>
+              <a:t>2026. 04. 19.</a:t>
             </a:fld>
             <a:endParaRPr lang="hu-HU"/>
           </a:p>
@@ -727,7 +767,7 @@
             <a:fld id="{5816CF25-28A6-44B7-AA26-A9DDEE15FAB8}" type="datetimeFigureOut">
               <a:rPr lang="hu-HU" smtClean="0"/>
               <a:pPr/>
-              <a:t>2026. 04. 11.</a:t>
+              <a:t>2026. 04. 19.</a:t>
             </a:fld>
             <a:endParaRPr lang="hu-HU"/>
           </a:p>
@@ -1011,7 +1051,7 @@
             <a:fld id="{5816CF25-28A6-44B7-AA26-A9DDEE15FAB8}" type="datetimeFigureOut">
               <a:rPr lang="hu-HU" smtClean="0"/>
               <a:pPr/>
-              <a:t>2026. 04. 11.</a:t>
+              <a:t>2026. 04. 19.</a:t>
             </a:fld>
             <a:endParaRPr lang="hu-HU" dirty="0"/>
           </a:p>
@@ -1357,7 +1397,7 @@
             <a:fld id="{5816CF25-28A6-44B7-AA26-A9DDEE15FAB8}" type="datetimeFigureOut">
               <a:rPr lang="hu-HU" smtClean="0"/>
               <a:pPr/>
-              <a:t>2026. 04. 11.</a:t>
+              <a:t>2026. 04. 19.</a:t>
             </a:fld>
             <a:endParaRPr lang="hu-HU" dirty="0"/>
           </a:p>
@@ -1515,7 +1555,7 @@
             <a:fld id="{5816CF25-28A6-44B7-AA26-A9DDEE15FAB8}" type="datetimeFigureOut">
               <a:rPr lang="hu-HU" smtClean="0"/>
               <a:pPr/>
-              <a:t>2026. 04. 11.</a:t>
+              <a:t>2026. 04. 19.</a:t>
             </a:fld>
             <a:endParaRPr lang="hu-HU"/>
           </a:p>
@@ -1632,7 +1672,7 @@
             <a:fld id="{5816CF25-28A6-44B7-AA26-A9DDEE15FAB8}" type="datetimeFigureOut">
               <a:rPr lang="hu-HU" smtClean="0"/>
               <a:pPr/>
-              <a:t>2026. 04. 11.</a:t>
+              <a:t>2026. 04. 19.</a:t>
             </a:fld>
             <a:endParaRPr lang="hu-HU"/>
           </a:p>
@@ -1854,7 +1894,7 @@
           <a:p>
             <a:fld id="{5816CF25-28A6-44B7-AA26-A9DDEE15FAB8}" type="datetimeFigureOut">
               <a:rPr lang="hu-HU" smtClean="0"/>
-              <a:t>2026. 04. 11.</a:t>
+              <a:t>2026. 04. 19.</a:t>
             </a:fld>
             <a:endParaRPr lang="hu-HU"/>
           </a:p>
@@ -2691,7 +2731,7 @@
           <p:cNvPr id="2" name="Cím 1">
             <a:extLst>
               <a:ext uri="{FF2B5EF4-FFF2-40B4-BE49-F238E27FC236}">
-                <a16:creationId xmlns:a16="http://schemas.microsoft.com/office/drawing/2014/main" id="{6C0E469C-E30D-5EBD-C97A-2EEC3EE49CF3}"/>
+                <a16:creationId xmlns:a16="http://schemas.microsoft.com/office/drawing/2014/main" id="{BAFF35F4-B390-A234-6862-6FF124B7E8CB}"/>
               </a:ext>
             </a:extLst>
           </p:cNvPr>
@@ -2709,7 +2749,7 @@
           <a:p>
             <a:r>
               <a:rPr lang="hu-HU" dirty="0"/>
-              <a:t>Követelmények</a:t>
+              <a:t>Mérföldkövek</a:t>
             </a:r>
           </a:p>
         </p:txBody>
@@ -2719,7 +2759,7 @@
           <p:cNvPr id="3" name="Tartalom helye 2">
             <a:extLst>
               <a:ext uri="{FF2B5EF4-FFF2-40B4-BE49-F238E27FC236}">
-                <a16:creationId xmlns:a16="http://schemas.microsoft.com/office/drawing/2014/main" id="{6E320CBC-5360-018B-216D-45A27D1FFC7B}"/>
+                <a16:creationId xmlns:a16="http://schemas.microsoft.com/office/drawing/2014/main" id="{0827CC1D-AB15-347A-E944-787652EF894A}"/>
               </a:ext>
             </a:extLst>
           </p:cNvPr>
@@ -2737,15 +2777,60 @@
           <a:p>
             <a:r>
               <a:rPr lang="hu-HU" dirty="0"/>
-              <a:t>A rendszernek 0-50 km/h sebességtartományban, szigorúan 20 </a:t>
-            </a:r>
+              <a:t>M1: Alapozás és Architektúra:</a:t>
+            </a:r>
+          </a:p>
+          <a:p>
+            <a:pPr lvl="1"/>
             <a:r>
               <a:rPr lang="hu-HU" dirty="0" err="1"/>
-              <a:t>ms</a:t>
-            </a:r>
-            <a:r>
-              <a:rPr lang="hu-HU" dirty="0"/>
-              <a:t>-os fix ciklusidővel kell stabilan működnie.</a:t>
+              <a:t>Skeletonok</a:t>
+            </a:r>
+            <a:endParaRPr lang="hu-HU" dirty="0"/>
+          </a:p>
+          <a:p>
+            <a:pPr lvl="1"/>
+            <a:r>
+              <a:rPr lang="hu-HU" dirty="0" err="1"/>
+              <a:t>Nodeok</a:t>
+            </a:r>
+            <a:r>
+              <a:rPr lang="hu-HU" dirty="0"/>
+              <a:t> összefűzése</a:t>
+            </a:r>
+          </a:p>
+          <a:p>
+            <a:pPr lvl="1"/>
+            <a:r>
+              <a:rPr lang="hu-HU" dirty="0"/>
+              <a:t>Vizualizáció</a:t>
+            </a:r>
+          </a:p>
+          <a:p>
+            <a:r>
+              <a:rPr lang="hu-HU" dirty="0"/>
+              <a:t>M2: Funkcionális Logika:</a:t>
+            </a:r>
+          </a:p>
+          <a:p>
+            <a:pPr lvl="1"/>
+            <a:r>
+              <a:rPr lang="hu-HU" dirty="0"/>
+              <a:t>Ütközési esemény érzékelése</a:t>
+            </a:r>
+          </a:p>
+          <a:p>
+            <a:pPr lvl="1"/>
+            <a:r>
+              <a:rPr lang="hu-HU" dirty="0"/>
+              <a:t>Döntéshozatal</a:t>
+            </a:r>
+          </a:p>
+          <a:p>
+            <a:pPr lvl="1"/>
+            <a:r>
+              <a:rPr lang="hu-HU" dirty="0"/>
+              <a:t>Beavatkozás</a:t>
             </a:r>
           </a:p>
         </p:txBody>
@@ -2753,7 +2838,7 @@
     </p:spTree>
     <p:extLst>
       <p:ext uri="{BB962C8B-B14F-4D97-AF65-F5344CB8AC3E}">
-        <p14:creationId xmlns:p14="http://schemas.microsoft.com/office/powerpoint/2010/main" val="3119104914"/>
+        <p14:creationId xmlns:p14="http://schemas.microsoft.com/office/powerpoint/2010/main" val="924554517"/>
       </p:ext>
     </p:extLst>
   </p:cSld>
@@ -2768,7 +2853,13 @@
   <p:cSld>
     <p:spTree>
       <p:nvGrpSpPr>
-        <p:cNvPr id="1" name=""/>
+        <p:cNvPr id="1" name="">
+          <a:extLst>
+            <a:ext uri="{FF2B5EF4-FFF2-40B4-BE49-F238E27FC236}">
+              <a16:creationId xmlns:a16="http://schemas.microsoft.com/office/drawing/2014/main" id="{B3477479-E1CD-90DB-D335-AC6054FB5A1B}"/>
+            </a:ext>
+          </a:extLst>
+        </p:cNvPr>
         <p:cNvGrpSpPr/>
         <p:nvPr/>
       </p:nvGrpSpPr>
@@ -2785,7 +2876,7 @@
           <p:cNvPr id="2" name="Cím 1">
             <a:extLst>
               <a:ext uri="{FF2B5EF4-FFF2-40B4-BE49-F238E27FC236}">
-                <a16:creationId xmlns:a16="http://schemas.microsoft.com/office/drawing/2014/main" id="{B136084E-E9D3-14A3-447A-1FC4E021C41B}"/>
+                <a16:creationId xmlns:a16="http://schemas.microsoft.com/office/drawing/2014/main" id="{B0943A5C-E1A4-FD86-5FA0-6C1E7697DB0C}"/>
               </a:ext>
             </a:extLst>
           </p:cNvPr>
@@ -2803,7 +2894,7 @@
           <a:p>
             <a:r>
               <a:rPr lang="hu-HU" dirty="0"/>
-              <a:t>Implementáció</a:t>
+              <a:t>Mérföldkövek</a:t>
             </a:r>
           </a:p>
         </p:txBody>
@@ -2813,7 +2904,7 @@
           <p:cNvPr id="3" name="Tartalom helye 2">
             <a:extLst>
               <a:ext uri="{FF2B5EF4-FFF2-40B4-BE49-F238E27FC236}">
-                <a16:creationId xmlns:a16="http://schemas.microsoft.com/office/drawing/2014/main" id="{8316423C-1EE9-383A-4B92-4C6FB7A293F5}"/>
+                <a16:creationId xmlns:a16="http://schemas.microsoft.com/office/drawing/2014/main" id="{1D7E26D1-0904-2021-C231-47F609A841B2}"/>
               </a:ext>
             </a:extLst>
           </p:cNvPr>
@@ -2826,132 +2917,90 @@
         </p:nvSpPr>
         <p:spPr/>
         <p:txBody>
-          <a:bodyPr>
-            <a:normAutofit fontScale="92500"/>
-          </a:bodyPr>
+          <a:bodyPr/>
           <a:lstStyle/>
           <a:p>
             <a:r>
-              <a:rPr lang="hu-HU" b="1" dirty="0"/>
-              <a:t>ROS (Robot </a:t>
-            </a:r>
-            <a:r>
-              <a:rPr lang="hu-HU" b="1" dirty="0" err="1"/>
-              <a:t>Operating</a:t>
-            </a:r>
-            <a:r>
-              <a:rPr lang="hu-HU" b="1" dirty="0"/>
-              <a:t> System):</a:t>
-            </a:r>
-            <a:r>
-              <a:rPr lang="hu-HU" dirty="0"/>
-              <a:t> A szoftverarchitektúra elosztott, </a:t>
-            </a:r>
-            <a:r>
-              <a:rPr lang="hu-HU" dirty="0" err="1"/>
-              <a:t>topic</a:t>
-            </a:r>
-            <a:r>
-              <a:rPr lang="hu-HU" dirty="0"/>
-              <a:t>-alapú kommunikációra (pl. /</a:t>
-            </a:r>
-            <a:r>
-              <a:rPr lang="hu-HU" dirty="0" err="1"/>
-              <a:t>scenario</a:t>
-            </a:r>
-            <a:r>
-              <a:rPr lang="hu-HU" dirty="0"/>
-              <a:t>, ego) épül a keretrendszeren belül.</a:t>
-            </a:r>
-          </a:p>
-          <a:p>
-            <a:r>
-              <a:rPr lang="hu-HU" b="1" dirty="0" err="1"/>
-              <a:t>Node</a:t>
-            </a:r>
-            <a:r>
-              <a:rPr lang="hu-HU" b="1" dirty="0"/>
-              <a:t>-ok:</a:t>
-            </a:r>
-            <a:r>
-              <a:rPr lang="hu-HU" dirty="0"/>
-              <a:t> Három dedikált </a:t>
-            </a:r>
-            <a:r>
-              <a:rPr lang="hu-HU" dirty="0" err="1"/>
-              <a:t>node</a:t>
-            </a:r>
-            <a:r>
-              <a:rPr lang="hu-HU" dirty="0"/>
-              <a:t>-ot készítünk: Viselkedéstervezés (stratégia és célkiválasztás), Mozgástervezés (sebességprofil), és Mozgásszabályozás (kimeneti célsebesség).</a:t>
-            </a:r>
-          </a:p>
-          <a:p>
-            <a:r>
-              <a:rPr lang="hu-HU" b="1" dirty="0"/>
-              <a:t>Fizikai egyenletek:</a:t>
-            </a:r>
-            <a:r>
-              <a:rPr lang="hu-HU" dirty="0"/>
-              <a:t> A biztonságos fékút meghatározása a maximális gyorsulás és rántás (</a:t>
-            </a:r>
-            <a:r>
-              <a:rPr lang="hu-HU" dirty="0" err="1"/>
-              <a:t>jerk</a:t>
-            </a:r>
-            <a:r>
-              <a:rPr lang="hu-HU" dirty="0"/>
-              <a:t>) fizikai </a:t>
-            </a:r>
-            <a:r>
-              <a:rPr lang="hu-HU" dirty="0" err="1"/>
-              <a:t>korlátainak</a:t>
-            </a:r>
-            <a:r>
-              <a:rPr lang="hu-HU" dirty="0"/>
-              <a:t> figyelembevételével történik.</a:t>
-            </a:r>
-          </a:p>
-          <a:p>
-            <a:r>
-              <a:rPr lang="hu-HU" b="1" dirty="0"/>
-              <a:t>Kód:</a:t>
-            </a:r>
-            <a:r>
-              <a:rPr lang="hu-HU" dirty="0"/>
-              <a:t> Determinisztikus futást és egy stabil állapotgépet (Monitoring, </a:t>
-            </a:r>
-            <a:r>
-              <a:rPr lang="hu-HU" dirty="0" err="1"/>
-              <a:t>Warning</a:t>
-            </a:r>
-            <a:r>
-              <a:rPr lang="hu-HU" dirty="0"/>
-              <a:t>, </a:t>
-            </a:r>
-            <a:r>
-              <a:rPr lang="hu-HU" dirty="0" err="1"/>
-              <a:t>Full</a:t>
-            </a:r>
-            <a:r>
-              <a:rPr lang="hu-HU" dirty="0"/>
-              <a:t> </a:t>
-            </a:r>
-            <a:r>
-              <a:rPr lang="hu-HU" dirty="0" err="1"/>
-              <a:t>Brake</a:t>
-            </a:r>
-            <a:r>
-              <a:rPr lang="hu-HU" dirty="0"/>
-              <a:t>) valósítunk meg, szigorú hibakezeléssel C++ programnyelven.</a:t>
-            </a:r>
+              <a:rPr lang="hu-HU" dirty="0"/>
+              <a:t>M3: Rendszerintegráció és Alapvető Működés:</a:t>
+            </a:r>
+          </a:p>
+          <a:p>
+            <a:pPr lvl="1"/>
+            <a:r>
+              <a:rPr lang="hu-HU" dirty="0"/>
+              <a:t>Ütközési esemény érzékelésének integrációja</a:t>
+            </a:r>
+          </a:p>
+          <a:p>
+            <a:pPr lvl="1"/>
+            <a:r>
+              <a:rPr lang="hu-HU" dirty="0"/>
+              <a:t>Döntéshozatal integrációja</a:t>
+            </a:r>
+          </a:p>
+          <a:p>
+            <a:pPr lvl="1"/>
+            <a:r>
+              <a:rPr lang="hu-HU" dirty="0"/>
+              <a:t>Beavatkozás integrációja</a:t>
+            </a:r>
+          </a:p>
+          <a:p>
+            <a:r>
+              <a:rPr lang="hu-HU" dirty="0"/>
+              <a:t>M4: Robusztusság és Véglegesítés:</a:t>
+            </a:r>
+          </a:p>
+          <a:p>
+            <a:pPr lvl="1"/>
+            <a:r>
+              <a:rPr lang="hu-HU" dirty="0"/>
+              <a:t>Robusztusság</a:t>
+            </a:r>
+          </a:p>
+          <a:p>
+            <a:pPr lvl="1"/>
+            <a:r>
+              <a:rPr lang="hu-HU" dirty="0"/>
+              <a:t>Konfigurálhatóság</a:t>
+            </a:r>
+          </a:p>
+          <a:p>
+            <a:pPr lvl="1"/>
+            <a:r>
+              <a:rPr lang="hu-HU" dirty="0"/>
+              <a:t>Dokumentáció</a:t>
+            </a:r>
+          </a:p>
+          <a:p>
+            <a:pPr lvl="1"/>
+            <a:r>
+              <a:rPr lang="hu-HU"/>
+              <a:t>Prezentáció</a:t>
+            </a:r>
+            <a:endParaRPr lang="hu-HU" dirty="0"/>
+          </a:p>
+          <a:p>
+            <a:pPr marL="0" indent="0">
+              <a:buNone/>
+            </a:pPr>
+            <a:endParaRPr lang="hu-HU" dirty="0"/>
+          </a:p>
+          <a:p>
+            <a:pPr lvl="1"/>
+            <a:endParaRPr lang="hu-HU" dirty="0"/>
+          </a:p>
+          <a:p>
+            <a:pPr lvl="1"/>
+            <a:endParaRPr lang="hu-HU" dirty="0"/>
           </a:p>
         </p:txBody>
       </p:sp>
     </p:spTree>
     <p:extLst>
       <p:ext uri="{BB962C8B-B14F-4D97-AF65-F5344CB8AC3E}">
-        <p14:creationId xmlns:p14="http://schemas.microsoft.com/office/powerpoint/2010/main" val="4184740914"/>
+        <p14:creationId xmlns:p14="http://schemas.microsoft.com/office/powerpoint/2010/main" val="2832333463"/>
       </p:ext>
     </p:extLst>
   </p:cSld>
@@ -2983,7 +3032,7 @@
           <p:cNvPr id="2" name="Cím 1">
             <a:extLst>
               <a:ext uri="{FF2B5EF4-FFF2-40B4-BE49-F238E27FC236}">
-                <a16:creationId xmlns:a16="http://schemas.microsoft.com/office/drawing/2014/main" id="{BD5A3622-BA5D-A595-B559-8252BF5E9AAD}"/>
+                <a16:creationId xmlns:a16="http://schemas.microsoft.com/office/drawing/2014/main" id="{6C0E469C-E30D-5EBD-C97A-2EEC3EE49CF3}"/>
               </a:ext>
             </a:extLst>
           </p:cNvPr>
@@ -3001,7 +3050,7 @@
           <a:p>
             <a:r>
               <a:rPr lang="hu-HU" dirty="0"/>
-              <a:t>Validációs koncepció</a:t>
+              <a:t>Követelmények</a:t>
             </a:r>
           </a:p>
         </p:txBody>
@@ -3011,7 +3060,7 @@
           <p:cNvPr id="3" name="Tartalom helye 2">
             <a:extLst>
               <a:ext uri="{FF2B5EF4-FFF2-40B4-BE49-F238E27FC236}">
-                <a16:creationId xmlns:a16="http://schemas.microsoft.com/office/drawing/2014/main" id="{684B1C3A-EAA6-D8F0-ABEC-4869B8975AF1}"/>
+                <a16:creationId xmlns:a16="http://schemas.microsoft.com/office/drawing/2014/main" id="{6E320CBC-5360-018B-216D-45A27D1FFC7B}"/>
               </a:ext>
             </a:extLst>
           </p:cNvPr>
@@ -3028,6 +3077,298 @@
           <a:lstStyle/>
           <a:p>
             <a:r>
+              <a:rPr lang="hu-HU" dirty="0"/>
+              <a:t>A rendszernek 0-50 km/h sebességtartományban, szigorúan 20 </a:t>
+            </a:r>
+            <a:r>
+              <a:rPr lang="hu-HU" dirty="0" err="1"/>
+              <a:t>ms</a:t>
+            </a:r>
+            <a:r>
+              <a:rPr lang="hu-HU" dirty="0"/>
+              <a:t>-os fix ciklusidővel kell stabilan működnie.</a:t>
+            </a:r>
+          </a:p>
+        </p:txBody>
+      </p:sp>
+    </p:spTree>
+    <p:extLst>
+      <p:ext uri="{BB962C8B-B14F-4D97-AF65-F5344CB8AC3E}">
+        <p14:creationId xmlns:p14="http://schemas.microsoft.com/office/powerpoint/2010/main" val="3119104914"/>
+      </p:ext>
+    </p:extLst>
+  </p:cSld>
+  <p:clrMapOvr>
+    <a:masterClrMapping/>
+  </p:clrMapOvr>
+</p:sld>
+</file>
+
+<file path=ppt/slides/slide7.xml><?xml version="1.0" encoding="utf-8"?>
+<p:sld xmlns:a="http://schemas.openxmlformats.org/drawingml/2006/main" xmlns:r="http://schemas.openxmlformats.org/officeDocument/2006/relationships" xmlns:p="http://schemas.openxmlformats.org/presentationml/2006/main">
+  <p:cSld>
+    <p:spTree>
+      <p:nvGrpSpPr>
+        <p:cNvPr id="1" name=""/>
+        <p:cNvGrpSpPr/>
+        <p:nvPr/>
+      </p:nvGrpSpPr>
+      <p:grpSpPr>
+        <a:xfrm>
+          <a:off x="0" y="0"/>
+          <a:ext cx="0" cy="0"/>
+          <a:chOff x="0" y="0"/>
+          <a:chExt cx="0" cy="0"/>
+        </a:xfrm>
+      </p:grpSpPr>
+      <p:sp>
+        <p:nvSpPr>
+          <p:cNvPr id="2" name="Cím 1">
+            <a:extLst>
+              <a:ext uri="{FF2B5EF4-FFF2-40B4-BE49-F238E27FC236}">
+                <a16:creationId xmlns:a16="http://schemas.microsoft.com/office/drawing/2014/main" id="{B136084E-E9D3-14A3-447A-1FC4E021C41B}"/>
+              </a:ext>
+            </a:extLst>
+          </p:cNvPr>
+          <p:cNvSpPr>
+            <a:spLocks noGrp="1"/>
+          </p:cNvSpPr>
+          <p:nvPr>
+            <p:ph type="title"/>
+          </p:nvPr>
+        </p:nvSpPr>
+        <p:spPr/>
+        <p:txBody>
+          <a:bodyPr/>
+          <a:lstStyle/>
+          <a:p>
+            <a:r>
+              <a:rPr lang="hu-HU" dirty="0"/>
+              <a:t>Implementáció</a:t>
+            </a:r>
+          </a:p>
+        </p:txBody>
+      </p:sp>
+      <p:sp>
+        <p:nvSpPr>
+          <p:cNvPr id="3" name="Tartalom helye 2">
+            <a:extLst>
+              <a:ext uri="{FF2B5EF4-FFF2-40B4-BE49-F238E27FC236}">
+                <a16:creationId xmlns:a16="http://schemas.microsoft.com/office/drawing/2014/main" id="{8316423C-1EE9-383A-4B92-4C6FB7A293F5}"/>
+              </a:ext>
+            </a:extLst>
+          </p:cNvPr>
+          <p:cNvSpPr>
+            <a:spLocks noGrp="1"/>
+          </p:cNvSpPr>
+          <p:nvPr>
+            <p:ph idx="1"/>
+          </p:nvPr>
+        </p:nvSpPr>
+        <p:spPr/>
+        <p:txBody>
+          <a:bodyPr>
+            <a:normAutofit fontScale="92500"/>
+          </a:bodyPr>
+          <a:lstStyle/>
+          <a:p>
+            <a:r>
+              <a:rPr lang="hu-HU" b="1" dirty="0"/>
+              <a:t>ROS (Robot </a:t>
+            </a:r>
+            <a:r>
+              <a:rPr lang="hu-HU" b="1" dirty="0" err="1"/>
+              <a:t>Operating</a:t>
+            </a:r>
+            <a:r>
+              <a:rPr lang="hu-HU" b="1" dirty="0"/>
+              <a:t> System):</a:t>
+            </a:r>
+            <a:r>
+              <a:rPr lang="hu-HU" dirty="0"/>
+              <a:t> A szoftverarchitektúra elosztott, </a:t>
+            </a:r>
+            <a:r>
+              <a:rPr lang="hu-HU" dirty="0" err="1"/>
+              <a:t>topic</a:t>
+            </a:r>
+            <a:r>
+              <a:rPr lang="hu-HU" dirty="0"/>
+              <a:t>-alapú kommunikációra (pl. /</a:t>
+            </a:r>
+            <a:r>
+              <a:rPr lang="hu-HU" dirty="0" err="1"/>
+              <a:t>scenario</a:t>
+            </a:r>
+            <a:r>
+              <a:rPr lang="hu-HU" dirty="0"/>
+              <a:t>, /ego) épül a keretrendszeren belül.</a:t>
+            </a:r>
+          </a:p>
+          <a:p>
+            <a:r>
+              <a:rPr lang="hu-HU" b="1" dirty="0" err="1"/>
+              <a:t>Node</a:t>
+            </a:r>
+            <a:r>
+              <a:rPr lang="hu-HU" b="1" dirty="0"/>
+              <a:t>-ok:</a:t>
+            </a:r>
+            <a:r>
+              <a:rPr lang="hu-HU" dirty="0"/>
+              <a:t> Három dedikált </a:t>
+            </a:r>
+            <a:r>
+              <a:rPr lang="hu-HU" dirty="0" err="1"/>
+              <a:t>node</a:t>
+            </a:r>
+            <a:r>
+              <a:rPr lang="hu-HU" dirty="0"/>
+              <a:t>-ot készítünk: Viselkedéstervezés (stratégia és célkiválasztás), Mozgástervezés (sebességprofil), és Mozgásszabályozás (kimeneti célsebesség).</a:t>
+            </a:r>
+          </a:p>
+          <a:p>
+            <a:r>
+              <a:rPr lang="hu-HU" b="1" dirty="0"/>
+              <a:t>Fizikai egyenletek:</a:t>
+            </a:r>
+            <a:r>
+              <a:rPr lang="hu-HU" dirty="0"/>
+              <a:t> A biztonságos fékút meghatározása a maximális gyorsulás és rántás (</a:t>
+            </a:r>
+            <a:r>
+              <a:rPr lang="hu-HU" dirty="0" err="1"/>
+              <a:t>jerk</a:t>
+            </a:r>
+            <a:r>
+              <a:rPr lang="hu-HU" dirty="0"/>
+              <a:t>) fizikai </a:t>
+            </a:r>
+            <a:r>
+              <a:rPr lang="hu-HU" dirty="0" err="1"/>
+              <a:t>korlátainak</a:t>
+            </a:r>
+            <a:r>
+              <a:rPr lang="hu-HU" dirty="0"/>
+              <a:t> figyelembevételével történik.</a:t>
+            </a:r>
+          </a:p>
+          <a:p>
+            <a:r>
+              <a:rPr lang="hu-HU" b="1" dirty="0"/>
+              <a:t>Kód:</a:t>
+            </a:r>
+            <a:r>
+              <a:rPr lang="hu-HU" dirty="0"/>
+              <a:t> Determinisztikus futást és egy stabil állapotgépet (Monitoring, </a:t>
+            </a:r>
+            <a:r>
+              <a:rPr lang="hu-HU" dirty="0" err="1"/>
+              <a:t>Warning</a:t>
+            </a:r>
+            <a:r>
+              <a:rPr lang="hu-HU" dirty="0"/>
+              <a:t>, </a:t>
+            </a:r>
+            <a:r>
+              <a:rPr lang="hu-HU" dirty="0" err="1"/>
+              <a:t>Full</a:t>
+            </a:r>
+            <a:r>
+              <a:rPr lang="hu-HU" dirty="0"/>
+              <a:t> </a:t>
+            </a:r>
+            <a:r>
+              <a:rPr lang="hu-HU" dirty="0" err="1"/>
+              <a:t>Brake</a:t>
+            </a:r>
+            <a:r>
+              <a:rPr lang="hu-HU" dirty="0"/>
+              <a:t>) valósítunk meg, C++ programnyelven.</a:t>
+            </a:r>
+          </a:p>
+        </p:txBody>
+      </p:sp>
+    </p:spTree>
+    <p:extLst>
+      <p:ext uri="{BB962C8B-B14F-4D97-AF65-F5344CB8AC3E}">
+        <p14:creationId xmlns:p14="http://schemas.microsoft.com/office/powerpoint/2010/main" val="4184740914"/>
+      </p:ext>
+    </p:extLst>
+  </p:cSld>
+  <p:clrMapOvr>
+    <a:masterClrMapping/>
+  </p:clrMapOvr>
+</p:sld>
+</file>
+
+<file path=ppt/slides/slide8.xml><?xml version="1.0" encoding="utf-8"?>
+<p:sld xmlns:a="http://schemas.openxmlformats.org/drawingml/2006/main" xmlns:r="http://schemas.openxmlformats.org/officeDocument/2006/relationships" xmlns:p="http://schemas.openxmlformats.org/presentationml/2006/main">
+  <p:cSld>
+    <p:spTree>
+      <p:nvGrpSpPr>
+        <p:cNvPr id="1" name=""/>
+        <p:cNvGrpSpPr/>
+        <p:nvPr/>
+      </p:nvGrpSpPr>
+      <p:grpSpPr>
+        <a:xfrm>
+          <a:off x="0" y="0"/>
+          <a:ext cx="0" cy="0"/>
+          <a:chOff x="0" y="0"/>
+          <a:chExt cx="0" cy="0"/>
+        </a:xfrm>
+      </p:grpSpPr>
+      <p:sp>
+        <p:nvSpPr>
+          <p:cNvPr id="2" name="Cím 1">
+            <a:extLst>
+              <a:ext uri="{FF2B5EF4-FFF2-40B4-BE49-F238E27FC236}">
+                <a16:creationId xmlns:a16="http://schemas.microsoft.com/office/drawing/2014/main" id="{BD5A3622-BA5D-A595-B559-8252BF5E9AAD}"/>
+              </a:ext>
+            </a:extLst>
+          </p:cNvPr>
+          <p:cNvSpPr>
+            <a:spLocks noGrp="1"/>
+          </p:cNvSpPr>
+          <p:nvPr>
+            <p:ph type="title"/>
+          </p:nvPr>
+        </p:nvSpPr>
+        <p:spPr/>
+        <p:txBody>
+          <a:bodyPr/>
+          <a:lstStyle/>
+          <a:p>
+            <a:r>
+              <a:rPr lang="hu-HU" dirty="0"/>
+              <a:t>Validációs koncepció</a:t>
+            </a:r>
+          </a:p>
+        </p:txBody>
+      </p:sp>
+      <p:sp>
+        <p:nvSpPr>
+          <p:cNvPr id="3" name="Tartalom helye 2">
+            <a:extLst>
+              <a:ext uri="{FF2B5EF4-FFF2-40B4-BE49-F238E27FC236}">
+                <a16:creationId xmlns:a16="http://schemas.microsoft.com/office/drawing/2014/main" id="{684B1C3A-EAA6-D8F0-ABEC-4869B8975AF1}"/>
+              </a:ext>
+            </a:extLst>
+          </p:cNvPr>
+          <p:cNvSpPr>
+            <a:spLocks noGrp="1"/>
+          </p:cNvSpPr>
+          <p:nvPr>
+            <p:ph idx="1"/>
+          </p:nvPr>
+        </p:nvSpPr>
+        <p:spPr/>
+        <p:txBody>
+          <a:bodyPr/>
+          <a:lstStyle/>
+          <a:p>
+            <a:r>
               <a:rPr lang="hu-HU" b="1" dirty="0"/>
               <a:t>Szimuláció és koncepció:</a:t>
             </a:r>
@@ -3043,8 +3384,13 @@
             </a:r>
             <a:r>
               <a:rPr lang="hu-HU" dirty="0"/>
-              <a:t> A szimulációs tesztek után a szoftver integrálása valós tesztautóba a mentorok felügyeletével és támogatásával követve az ipari tesztelési piramist.</a:t>
-            </a:r>
+              <a:t> A szimulációs tesztek után a szoftver integrálása valós tesztautóba a mentorok felügyeletével </a:t>
+            </a:r>
+            <a:r>
+              <a:rPr lang="hu-HU"/>
+              <a:t>és támogatásával.</a:t>
+            </a:r>
+            <a:endParaRPr lang="hu-HU" dirty="0"/>
           </a:p>
         </p:txBody>
       </p:sp>
@@ -3061,7 +3407,7 @@
 </p:sld>
 </file>
 
-<file path=ppt/slides/slide7.xml><?xml version="1.0" encoding="utf-8"?>
+<file path=ppt/slides/slide9.xml><?xml version="1.0" encoding="utf-8"?>
 <p:sld xmlns:a="http://schemas.openxmlformats.org/drawingml/2006/main" xmlns:r="http://schemas.openxmlformats.org/officeDocument/2006/relationships" xmlns:p="http://schemas.openxmlformats.org/presentationml/2006/main">
   <p:cSld>
     <p:spTree>

--- a/doc/Automated Emergency Brake Group2 HUN.pptx
+++ b/doc/Automated Emergency Brake Group2 HUN.pptx
@@ -120,20 +120,12 @@
 </p:presentation>
 </file>
 
-<file path=ppt/revisionInfo.xml><?xml version="1.0" encoding="utf-8"?>
-<p1510:revInfo xmlns:a="http://schemas.openxmlformats.org/drawingml/2006/main" xmlns:r="http://schemas.openxmlformats.org/officeDocument/2006/relationships" xmlns:p1510="http://schemas.microsoft.com/office/powerpoint/2015/10/main">
-  <p1510:revLst>
-    <p1510:client id="{46E060B1-5F1C-41C8-B681-E99EC520B449}" v="12" dt="2026-04-19T21:37:19.558"/>
-  </p1510:revLst>
-</p1510:revInfo>
-</file>
-
 <file path=ppt/changesInfos/changesInfo1.xml><?xml version="1.0" encoding="utf-8"?>
 <pc:chgInfo xmlns:a="http://schemas.openxmlformats.org/drawingml/2006/main" xmlns:r="http://schemas.openxmlformats.org/officeDocument/2006/relationships" xmlns:ac="http://schemas.microsoft.com/office/drawing/2013/main/command" xmlns:pc="http://schemas.microsoft.com/office/powerpoint/2013/main/command">
   <pc:docChgLst>
     <pc:chgData name="Horváth Gábor Timót" userId="6b190c0b-b7a5-44d6-a153-62faea1c1e8d" providerId="ADAL" clId="{E9885F06-42F8-43E5-9640-56F69EAE1246}"/>
     <pc:docChg chg="custSel addSld modSld">
-      <pc:chgData name="Horváth Gábor Timót" userId="6b190c0b-b7a5-44d6-a153-62faea1c1e8d" providerId="ADAL" clId="{E9885F06-42F8-43E5-9640-56F69EAE1246}" dt="2026-04-19T21:37:27.252" v="839" actId="20577"/>
+      <pc:chgData name="Horváth Gábor Timót" userId="6b190c0b-b7a5-44d6-a153-62faea1c1e8d" providerId="ADAL" clId="{E9885F06-42F8-43E5-9640-56F69EAE1246}" dt="2026-04-28T09:56:42.394" v="894" actId="20577"/>
       <pc:docMkLst>
         <pc:docMk/>
       </pc:docMkLst>
@@ -299,7 +291,7 @@
         </pc:spChg>
       </pc:sldChg>
       <pc:sldChg chg="modSp new mod">
-        <pc:chgData name="Horváth Gábor Timót" userId="6b190c0b-b7a5-44d6-a153-62faea1c1e8d" providerId="ADAL" clId="{E9885F06-42F8-43E5-9640-56F69EAE1246}" dt="2026-04-19T21:35:02.191" v="749"/>
+        <pc:chgData name="Horváth Gábor Timót" userId="6b190c0b-b7a5-44d6-a153-62faea1c1e8d" providerId="ADAL" clId="{E9885F06-42F8-43E5-9640-56F69EAE1246}" dt="2026-04-28T09:56:42.394" v="894" actId="20577"/>
         <pc:sldMkLst>
           <pc:docMk/>
           <pc:sldMk cId="924554517" sldId="263"/>
@@ -313,7 +305,7 @@
           </ac:spMkLst>
         </pc:spChg>
         <pc:spChg chg="mod">
-          <ac:chgData name="Horváth Gábor Timót" userId="6b190c0b-b7a5-44d6-a153-62faea1c1e8d" providerId="ADAL" clId="{E9885F06-42F8-43E5-9640-56F69EAE1246}" dt="2026-04-19T21:35:02.191" v="749"/>
+          <ac:chgData name="Horváth Gábor Timót" userId="6b190c0b-b7a5-44d6-a153-62faea1c1e8d" providerId="ADAL" clId="{E9885F06-42F8-43E5-9640-56F69EAE1246}" dt="2026-04-28T09:56:42.394" v="894" actId="20577"/>
           <ac:spMkLst>
             <pc:docMk/>
             <pc:sldMk cId="924554517" sldId="263"/>
@@ -517,7 +509,7 @@
             <a:fld id="{5816CF25-28A6-44B7-AA26-A9DDEE15FAB8}" type="datetimeFigureOut">
               <a:rPr lang="hu-HU" smtClean="0"/>
               <a:pPr/>
-              <a:t>2026. 04. 19.</a:t>
+              <a:t>2026. 04. 28.</a:t>
             </a:fld>
             <a:endParaRPr lang="hu-HU"/>
           </a:p>
@@ -767,7 +759,7 @@
             <a:fld id="{5816CF25-28A6-44B7-AA26-A9DDEE15FAB8}" type="datetimeFigureOut">
               <a:rPr lang="hu-HU" smtClean="0"/>
               <a:pPr/>
-              <a:t>2026. 04. 19.</a:t>
+              <a:t>2026. 04. 28.</a:t>
             </a:fld>
             <a:endParaRPr lang="hu-HU"/>
           </a:p>
@@ -1051,7 +1043,7 @@
             <a:fld id="{5816CF25-28A6-44B7-AA26-A9DDEE15FAB8}" type="datetimeFigureOut">
               <a:rPr lang="hu-HU" smtClean="0"/>
               <a:pPr/>
-              <a:t>2026. 04. 19.</a:t>
+              <a:t>2026. 04. 28.</a:t>
             </a:fld>
             <a:endParaRPr lang="hu-HU" dirty="0"/>
           </a:p>
@@ -1397,7 +1389,7 @@
             <a:fld id="{5816CF25-28A6-44B7-AA26-A9DDEE15FAB8}" type="datetimeFigureOut">
               <a:rPr lang="hu-HU" smtClean="0"/>
               <a:pPr/>
-              <a:t>2026. 04. 19.</a:t>
+              <a:t>2026. 04. 28.</a:t>
             </a:fld>
             <a:endParaRPr lang="hu-HU" dirty="0"/>
           </a:p>
@@ -1555,7 +1547,7 @@
             <a:fld id="{5816CF25-28A6-44B7-AA26-A9DDEE15FAB8}" type="datetimeFigureOut">
               <a:rPr lang="hu-HU" smtClean="0"/>
               <a:pPr/>
-              <a:t>2026. 04. 19.</a:t>
+              <a:t>2026. 04. 28.</a:t>
             </a:fld>
             <a:endParaRPr lang="hu-HU"/>
           </a:p>
@@ -1672,7 +1664,7 @@
             <a:fld id="{5816CF25-28A6-44B7-AA26-A9DDEE15FAB8}" type="datetimeFigureOut">
               <a:rPr lang="hu-HU" smtClean="0"/>
               <a:pPr/>
-              <a:t>2026. 04. 19.</a:t>
+              <a:t>2026. 04. 28.</a:t>
             </a:fld>
             <a:endParaRPr lang="hu-HU"/>
           </a:p>
@@ -1894,7 +1886,7 @@
           <a:p>
             <a:fld id="{5816CF25-28A6-44B7-AA26-A9DDEE15FAB8}" type="datetimeFigureOut">
               <a:rPr lang="hu-HU" smtClean="0"/>
-              <a:t>2026. 04. 19.</a:t>
+              <a:t>2026. 04. 28.</a:t>
             </a:fld>
             <a:endParaRPr lang="hu-HU"/>
           </a:p>
@@ -2832,6 +2824,33 @@
               <a:rPr lang="hu-HU" dirty="0"/>
               <a:t>Beavatkozás</a:t>
             </a:r>
+          </a:p>
+          <a:p>
+            <a:pPr lvl="1"/>
+            <a:r>
+              <a:rPr lang="hu-HU" dirty="0" err="1"/>
+              <a:t>Target</a:t>
+            </a:r>
+            <a:r>
+              <a:rPr lang="hu-HU" dirty="0"/>
+              <a:t> sávon belüli vizsgálata</a:t>
+            </a:r>
+          </a:p>
+          <a:p>
+            <a:pPr lvl="1"/>
+            <a:r>
+              <a:rPr lang="hu-HU" dirty="0" err="1"/>
+              <a:t>Jerk</a:t>
+            </a:r>
+            <a:r>
+              <a:rPr lang="hu-HU" dirty="0"/>
+              <a:t> és </a:t>
+            </a:r>
+            <a:r>
+              <a:rPr lang="hu-HU"/>
+              <a:t>Gyorsulás limit</a:t>
+            </a:r>
+            <a:endParaRPr lang="hu-HU" dirty="0"/>
           </a:p>
         </p:txBody>
       </p:sp>
